--- a/presentations/Interface_Resolved_Emulsion_Dynamics_Exploratory.pptx
+++ b/presentations/Interface_Resolved_Emulsion_Dynamics_Exploratory.pptx
@@ -3259,7 +3259,7 @@
           <a:spcPct val="20000"/>
         </a:spcBef>
         <a:buFont typeface="Arial"/>
-        <a:buChar char="–"/>
+        <a:buChar char="•"/>
         <a:defRPr sz="2800" kern="1200">
           <a:solidFill>
             <a:schemeClr val="tx1"/>
@@ -3289,7 +3289,7 @@
           <a:spcPct val="20000"/>
         </a:spcBef>
         <a:buFont typeface="Arial"/>
-        <a:buChar char="–"/>
+        <a:buChar char="•"/>
         <a:defRPr sz="2000" kern="1200">
           <a:solidFill>
             <a:schemeClr val="tx1"/>
